--- a/Figures/Figure3.pptx
+++ b/Figures/Figure3.pptx
@@ -197,7 +197,7 @@
           <a:p>
             <a:fld id="{F37F415A-1592-9A41-AB3D-8F61FC891795}" type="datetimeFigureOut">
               <a:rPr lang="en-US" smtClean="0"/>
-              <a:t>10/23/25</a:t>
+              <a:t>6/29/26</a:t>
             </a:fld>
             <a:endParaRPr lang="en-US"/>
           </a:p>
@@ -685,7 +685,7 @@
           <a:p>
             <a:fld id="{0C1A98C3-708C-BF45-9C6D-989FFCF4A5FD}" type="datetimeFigureOut">
               <a:rPr lang="en-US" smtClean="0"/>
-              <a:t>10/23/25</a:t>
+              <a:t>6/29/26</a:t>
             </a:fld>
             <a:endParaRPr lang="en-US"/>
           </a:p>
@@ -855,7 +855,7 @@
           <a:p>
             <a:fld id="{0C1A98C3-708C-BF45-9C6D-989FFCF4A5FD}" type="datetimeFigureOut">
               <a:rPr lang="en-US" smtClean="0"/>
-              <a:t>10/23/25</a:t>
+              <a:t>6/29/26</a:t>
             </a:fld>
             <a:endParaRPr lang="en-US"/>
           </a:p>
@@ -1035,7 +1035,7 @@
           <a:p>
             <a:fld id="{0C1A98C3-708C-BF45-9C6D-989FFCF4A5FD}" type="datetimeFigureOut">
               <a:rPr lang="en-US" smtClean="0"/>
-              <a:t>10/23/25</a:t>
+              <a:t>6/29/26</a:t>
             </a:fld>
             <a:endParaRPr lang="en-US"/>
           </a:p>
@@ -1205,7 +1205,7 @@
           <a:p>
             <a:fld id="{0C1A98C3-708C-BF45-9C6D-989FFCF4A5FD}" type="datetimeFigureOut">
               <a:rPr lang="en-US" smtClean="0"/>
-              <a:t>10/23/25</a:t>
+              <a:t>6/29/26</a:t>
             </a:fld>
             <a:endParaRPr lang="en-US"/>
           </a:p>
@@ -1451,7 +1451,7 @@
           <a:p>
             <a:fld id="{0C1A98C3-708C-BF45-9C6D-989FFCF4A5FD}" type="datetimeFigureOut">
               <a:rPr lang="en-US" smtClean="0"/>
-              <a:t>10/23/25</a:t>
+              <a:t>6/29/26</a:t>
             </a:fld>
             <a:endParaRPr lang="en-US"/>
           </a:p>
@@ -1683,7 +1683,7 @@
           <a:p>
             <a:fld id="{0C1A98C3-708C-BF45-9C6D-989FFCF4A5FD}" type="datetimeFigureOut">
               <a:rPr lang="en-US" smtClean="0"/>
-              <a:t>10/23/25</a:t>
+              <a:t>6/29/26</a:t>
             </a:fld>
             <a:endParaRPr lang="en-US"/>
           </a:p>
@@ -2050,7 +2050,7 @@
           <a:p>
             <a:fld id="{0C1A98C3-708C-BF45-9C6D-989FFCF4A5FD}" type="datetimeFigureOut">
               <a:rPr lang="en-US" smtClean="0"/>
-              <a:t>10/23/25</a:t>
+              <a:t>6/29/26</a:t>
             </a:fld>
             <a:endParaRPr lang="en-US"/>
           </a:p>
@@ -2168,7 +2168,7 @@
           <a:p>
             <a:fld id="{0C1A98C3-708C-BF45-9C6D-989FFCF4A5FD}" type="datetimeFigureOut">
               <a:rPr lang="en-US" smtClean="0"/>
-              <a:t>10/23/25</a:t>
+              <a:t>6/29/26</a:t>
             </a:fld>
             <a:endParaRPr lang="en-US"/>
           </a:p>
@@ -2263,7 +2263,7 @@
           <a:p>
             <a:fld id="{0C1A98C3-708C-BF45-9C6D-989FFCF4A5FD}" type="datetimeFigureOut">
               <a:rPr lang="en-US" smtClean="0"/>
-              <a:t>10/23/25</a:t>
+              <a:t>6/29/26</a:t>
             </a:fld>
             <a:endParaRPr lang="en-US"/>
           </a:p>
@@ -2540,7 +2540,7 @@
           <a:p>
             <a:fld id="{0C1A98C3-708C-BF45-9C6D-989FFCF4A5FD}" type="datetimeFigureOut">
               <a:rPr lang="en-US" smtClean="0"/>
-              <a:t>10/23/25</a:t>
+              <a:t>6/29/26</a:t>
             </a:fld>
             <a:endParaRPr lang="en-US"/>
           </a:p>
@@ -2797,7 +2797,7 @@
           <a:p>
             <a:fld id="{0C1A98C3-708C-BF45-9C6D-989FFCF4A5FD}" type="datetimeFigureOut">
               <a:rPr lang="en-US" smtClean="0"/>
-              <a:t>10/23/25</a:t>
+              <a:t>6/29/26</a:t>
             </a:fld>
             <a:endParaRPr lang="en-US"/>
           </a:p>
@@ -3010,7 +3010,7 @@
           <a:p>
             <a:fld id="{0C1A98C3-708C-BF45-9C6D-989FFCF4A5FD}" type="datetimeFigureOut">
               <a:rPr lang="en-US" smtClean="0"/>
-              <a:t>10/23/25</a:t>
+              <a:t>6/29/26</a:t>
             </a:fld>
             <a:endParaRPr lang="en-US"/>
           </a:p>
@@ -3431,7 +3431,7 @@
         </p:nvPicPr>
         <p:blipFill>
           <a:blip r:embed="rId3"/>
-          <a:srcRect t="3751" b="7731"/>
+          <a:srcRect t="5741" b="5741"/>
           <a:stretch/>
         </p:blipFill>
         <p:spPr>
@@ -3481,10 +3481,10 @@
       </p:sp>
       <p:pic>
         <p:nvPicPr>
-          <p:cNvPr id="3" name="Picture 2">
+          <p:cNvPr id="2" name="Picture 1">
             <a:extLst>
               <a:ext uri="{FF2B5EF4-FFF2-40B4-BE49-F238E27FC236}">
-                <a16:creationId xmlns:a16="http://schemas.microsoft.com/office/drawing/2014/main" id="{28AAB88C-9BED-E505-E597-C7D2D4B1AE22}"/>
+                <a16:creationId xmlns:a16="http://schemas.microsoft.com/office/drawing/2014/main" id="{203D0E6E-5DDD-B63A-2130-4BF4A9A7B459}"/>
               </a:ext>
             </a:extLst>
           </p:cNvPr>
@@ -3495,13 +3495,13 @@
         </p:nvPicPr>
         <p:blipFill>
           <a:blip r:embed="rId4"/>
-          <a:srcRect t="3055" b="3055"/>
+          <a:srcRect l="4228" r="4228"/>
           <a:stretch/>
         </p:blipFill>
         <p:spPr>
           <a:xfrm>
-            <a:off x="0" y="-664"/>
-            <a:ext cx="3168650" cy="2181689"/>
+            <a:off x="0" y="67586"/>
+            <a:ext cx="3169358" cy="1979875"/>
           </a:xfrm>
           <a:prstGeom prst="rect">
             <a:avLst/>
